--- a/presentation/Final_Presentation.pptx
+++ b/presentation/Final_Presentation.pptx
@@ -4,6 +4,9 @@
   <p:sldMasterIdLst>
     <p:sldMasterId id="2147483648" r:id="rId1"/>
   </p:sldMasterIdLst>
+  <p:notesMasterIdLst>
+    <p:notesMasterId r:id="rId16"/>
+  </p:notesMasterIdLst>
   <p:sldIdLst>
     <p:sldId id="256" r:id="rId2"/>
     <p:sldId id="257" r:id="rId3"/>
@@ -136,6 +139,440 @@
 </p:presentation>
 </file>
 
+<file path=ppt/notesMasters/notesMaster1.xml><?xml version="1.0" encoding="utf-8"?>
+<p:notesMaster xmlns:a="http://schemas.openxmlformats.org/drawingml/2006/main" xmlns:r="http://schemas.openxmlformats.org/officeDocument/2006/relationships" xmlns:p="http://schemas.openxmlformats.org/presentationml/2006/main">
+  <p:cSld>
+    <p:bg>
+      <p:bgRef idx="1001">
+        <a:schemeClr val="bg1"/>
+      </p:bgRef>
+    </p:bg>
+    <p:spTree>
+      <p:nvGrpSpPr>
+        <p:cNvPr id="1" name=""/>
+        <p:cNvGrpSpPr/>
+        <p:nvPr/>
+      </p:nvGrpSpPr>
+      <p:grpSpPr>
+        <a:xfrm>
+          <a:off x="0" y="0"/>
+          <a:ext cx="0" cy="0"/>
+          <a:chOff x="0" y="0"/>
+          <a:chExt cx="0" cy="0"/>
+        </a:xfrm>
+      </p:grpSpPr>
+      <p:sp>
+        <p:nvSpPr>
+          <p:cNvPr id="2" name="Header Placeholder 1"/>
+          <p:cNvSpPr>
+            <a:spLocks noGrp="1"/>
+          </p:cNvSpPr>
+          <p:nvPr>
+            <p:ph type="hdr" sz="quarter"/>
+          </p:nvPr>
+        </p:nvSpPr>
+        <p:spPr>
+          <a:xfrm>
+            <a:off x="0" y="0"/>
+            <a:ext cx="2971800" cy="458788"/>
+          </a:xfrm>
+          <a:prstGeom prst="rect">
+            <a:avLst/>
+          </a:prstGeom>
+        </p:spPr>
+        <p:txBody>
+          <a:bodyPr vert="horz" lIns="91440" tIns="45720" rIns="91440" bIns="45720" rtlCol="0"/>
+          <a:lstStyle>
+            <a:lvl1pPr algn="l">
+              <a:defRPr sz="1200"/>
+            </a:lvl1pPr>
+          </a:lstStyle>
+          <a:p>
+            <a:endParaRPr lang="en-IN"/>
+          </a:p>
+        </p:txBody>
+      </p:sp>
+      <p:sp>
+        <p:nvSpPr>
+          <p:cNvPr id="3" name="Date Placeholder 2"/>
+          <p:cNvSpPr>
+            <a:spLocks noGrp="1"/>
+          </p:cNvSpPr>
+          <p:nvPr>
+            <p:ph type="dt" idx="1"/>
+          </p:nvPr>
+        </p:nvSpPr>
+        <p:spPr>
+          <a:xfrm>
+            <a:off x="3884613" y="0"/>
+            <a:ext cx="2971800" cy="458788"/>
+          </a:xfrm>
+          <a:prstGeom prst="rect">
+            <a:avLst/>
+          </a:prstGeom>
+        </p:spPr>
+        <p:txBody>
+          <a:bodyPr vert="horz" lIns="91440" tIns="45720" rIns="91440" bIns="45720" rtlCol="0"/>
+          <a:lstStyle>
+            <a:lvl1pPr algn="r">
+              <a:defRPr sz="1200"/>
+            </a:lvl1pPr>
+          </a:lstStyle>
+          <a:p>
+            <a:fld id="{CD5D9F03-ADB2-478D-9EF2-BE508C1445EA}" type="datetimeFigureOut">
+              <a:rPr lang="en-IN" smtClean="0"/>
+              <a:t>27-08-2026</a:t>
+            </a:fld>
+            <a:endParaRPr lang="en-IN"/>
+          </a:p>
+        </p:txBody>
+      </p:sp>
+      <p:sp>
+        <p:nvSpPr>
+          <p:cNvPr id="4" name="Slide Image Placeholder 3"/>
+          <p:cNvSpPr>
+            <a:spLocks noGrp="1" noRot="1" noChangeAspect="1"/>
+          </p:cNvSpPr>
+          <p:nvPr>
+            <p:ph type="sldImg" idx="2"/>
+          </p:nvPr>
+        </p:nvSpPr>
+        <p:spPr>
+          <a:xfrm>
+            <a:off x="685800" y="1143000"/>
+            <a:ext cx="5486400" cy="3086100"/>
+          </a:xfrm>
+          <a:prstGeom prst="rect">
+            <a:avLst/>
+          </a:prstGeom>
+          <a:noFill/>
+          <a:ln w="12700">
+            <a:solidFill>
+              <a:prstClr val="black"/>
+            </a:solidFill>
+          </a:ln>
+        </p:spPr>
+        <p:txBody>
+          <a:bodyPr vert="horz" lIns="91440" tIns="45720" rIns="91440" bIns="45720" rtlCol="0" anchor="ctr"/>
+          <a:lstStyle/>
+          <a:p>
+            <a:endParaRPr lang="en-IN"/>
+          </a:p>
+        </p:txBody>
+      </p:sp>
+      <p:sp>
+        <p:nvSpPr>
+          <p:cNvPr id="5" name="Notes Placeholder 4"/>
+          <p:cNvSpPr>
+            <a:spLocks noGrp="1"/>
+          </p:cNvSpPr>
+          <p:nvPr>
+            <p:ph type="body" sz="quarter" idx="3"/>
+          </p:nvPr>
+        </p:nvSpPr>
+        <p:spPr>
+          <a:xfrm>
+            <a:off x="685800" y="4400550"/>
+            <a:ext cx="5486400" cy="3600450"/>
+          </a:xfrm>
+          <a:prstGeom prst="rect">
+            <a:avLst/>
+          </a:prstGeom>
+        </p:spPr>
+        <p:txBody>
+          <a:bodyPr vert="horz" lIns="91440" tIns="45720" rIns="91440" bIns="45720" rtlCol="0"/>
+          <a:lstStyle/>
+          <a:p>
+            <a:pPr lvl="0"/>
+            <a:r>
+              <a:rPr lang="en-US"/>
+              <a:t>Click to edit Master text styles</a:t>
+            </a:r>
+          </a:p>
+          <a:p>
+            <a:pPr lvl="1"/>
+            <a:r>
+              <a:rPr lang="en-US"/>
+              <a:t>Second level</a:t>
+            </a:r>
+          </a:p>
+          <a:p>
+            <a:pPr lvl="2"/>
+            <a:r>
+              <a:rPr lang="en-US"/>
+              <a:t>Third level</a:t>
+            </a:r>
+          </a:p>
+          <a:p>
+            <a:pPr lvl="3"/>
+            <a:r>
+              <a:rPr lang="en-US"/>
+              <a:t>Fourth level</a:t>
+            </a:r>
+          </a:p>
+          <a:p>
+            <a:pPr lvl="4"/>
+            <a:r>
+              <a:rPr lang="en-US"/>
+              <a:t>Fifth level</a:t>
+            </a:r>
+            <a:endParaRPr lang="en-IN"/>
+          </a:p>
+        </p:txBody>
+      </p:sp>
+      <p:sp>
+        <p:nvSpPr>
+          <p:cNvPr id="6" name="Footer Placeholder 5"/>
+          <p:cNvSpPr>
+            <a:spLocks noGrp="1"/>
+          </p:cNvSpPr>
+          <p:nvPr>
+            <p:ph type="ftr" sz="quarter" idx="4"/>
+          </p:nvPr>
+        </p:nvSpPr>
+        <p:spPr>
+          <a:xfrm>
+            <a:off x="0" y="8685213"/>
+            <a:ext cx="2971800" cy="458787"/>
+          </a:xfrm>
+          <a:prstGeom prst="rect">
+            <a:avLst/>
+          </a:prstGeom>
+        </p:spPr>
+        <p:txBody>
+          <a:bodyPr vert="horz" lIns="91440" tIns="45720" rIns="91440" bIns="45720" rtlCol="0" anchor="b"/>
+          <a:lstStyle>
+            <a:lvl1pPr algn="l">
+              <a:defRPr sz="1200"/>
+            </a:lvl1pPr>
+          </a:lstStyle>
+          <a:p>
+            <a:endParaRPr lang="en-IN"/>
+          </a:p>
+        </p:txBody>
+      </p:sp>
+      <p:sp>
+        <p:nvSpPr>
+          <p:cNvPr id="7" name="Slide Number Placeholder 6"/>
+          <p:cNvSpPr>
+            <a:spLocks noGrp="1"/>
+          </p:cNvSpPr>
+          <p:nvPr>
+            <p:ph type="sldNum" sz="quarter" idx="5"/>
+          </p:nvPr>
+        </p:nvSpPr>
+        <p:spPr>
+          <a:xfrm>
+            <a:off x="3884613" y="8685213"/>
+            <a:ext cx="2971800" cy="458787"/>
+          </a:xfrm>
+          <a:prstGeom prst="rect">
+            <a:avLst/>
+          </a:prstGeom>
+        </p:spPr>
+        <p:txBody>
+          <a:bodyPr vert="horz" lIns="91440" tIns="45720" rIns="91440" bIns="45720" rtlCol="0" anchor="b"/>
+          <a:lstStyle>
+            <a:lvl1pPr algn="r">
+              <a:defRPr sz="1200"/>
+            </a:lvl1pPr>
+          </a:lstStyle>
+          <a:p>
+            <a:fld id="{F7212A89-67CF-46C4-8032-13E00BEA7EAA}" type="slidenum">
+              <a:rPr lang="en-IN" smtClean="0"/>
+              <a:t>‹#›</a:t>
+            </a:fld>
+            <a:endParaRPr lang="en-IN"/>
+          </a:p>
+        </p:txBody>
+      </p:sp>
+    </p:spTree>
+    <p:extLst>
+      <p:ext uri="{BB962C8B-B14F-4D97-AF65-F5344CB8AC3E}">
+        <p14:creationId xmlns:p14="http://schemas.microsoft.com/office/powerpoint/2010/main" val="2296292116"/>
+      </p:ext>
+    </p:extLst>
+  </p:cSld>
+  <p:clrMap bg1="lt1" tx1="dk1" bg2="lt2" tx2="dk2" accent1="accent1" accent2="accent2" accent3="accent3" accent4="accent4" accent5="accent5" accent6="accent6" hlink="hlink" folHlink="folHlink"/>
+  <p:notesStyle>
+    <a:lvl1pPr marL="0" algn="l" defTabSz="914400" rtl="0" eaLnBrk="1" latinLnBrk="0" hangingPunct="1">
+      <a:defRPr sz="1200" kern="1200">
+        <a:solidFill>
+          <a:schemeClr val="tx1"/>
+        </a:solidFill>
+        <a:latin typeface="+mn-lt"/>
+        <a:ea typeface="+mn-ea"/>
+        <a:cs typeface="+mn-cs"/>
+      </a:defRPr>
+    </a:lvl1pPr>
+    <a:lvl2pPr marL="457200" algn="l" defTabSz="914400" rtl="0" eaLnBrk="1" latinLnBrk="0" hangingPunct="1">
+      <a:defRPr sz="1200" kern="1200">
+        <a:solidFill>
+          <a:schemeClr val="tx1"/>
+        </a:solidFill>
+        <a:latin typeface="+mn-lt"/>
+        <a:ea typeface="+mn-ea"/>
+        <a:cs typeface="+mn-cs"/>
+      </a:defRPr>
+    </a:lvl2pPr>
+    <a:lvl3pPr marL="914400" algn="l" defTabSz="914400" rtl="0" eaLnBrk="1" latinLnBrk="0" hangingPunct="1">
+      <a:defRPr sz="1200" kern="1200">
+        <a:solidFill>
+          <a:schemeClr val="tx1"/>
+        </a:solidFill>
+        <a:latin typeface="+mn-lt"/>
+        <a:ea typeface="+mn-ea"/>
+        <a:cs typeface="+mn-cs"/>
+      </a:defRPr>
+    </a:lvl3pPr>
+    <a:lvl4pPr marL="1371600" algn="l" defTabSz="914400" rtl="0" eaLnBrk="1" latinLnBrk="0" hangingPunct="1">
+      <a:defRPr sz="1200" kern="1200">
+        <a:solidFill>
+          <a:schemeClr val="tx1"/>
+        </a:solidFill>
+        <a:latin typeface="+mn-lt"/>
+        <a:ea typeface="+mn-ea"/>
+        <a:cs typeface="+mn-cs"/>
+      </a:defRPr>
+    </a:lvl4pPr>
+    <a:lvl5pPr marL="1828800" algn="l" defTabSz="914400" rtl="0" eaLnBrk="1" latinLnBrk="0" hangingPunct="1">
+      <a:defRPr sz="1200" kern="1200">
+        <a:solidFill>
+          <a:schemeClr val="tx1"/>
+        </a:solidFill>
+        <a:latin typeface="+mn-lt"/>
+        <a:ea typeface="+mn-ea"/>
+        <a:cs typeface="+mn-cs"/>
+      </a:defRPr>
+    </a:lvl5pPr>
+    <a:lvl6pPr marL="2286000" algn="l" defTabSz="914400" rtl="0" eaLnBrk="1" latinLnBrk="0" hangingPunct="1">
+      <a:defRPr sz="1200" kern="1200">
+        <a:solidFill>
+          <a:schemeClr val="tx1"/>
+        </a:solidFill>
+        <a:latin typeface="+mn-lt"/>
+        <a:ea typeface="+mn-ea"/>
+        <a:cs typeface="+mn-cs"/>
+      </a:defRPr>
+    </a:lvl6pPr>
+    <a:lvl7pPr marL="2743200" algn="l" defTabSz="914400" rtl="0" eaLnBrk="1" latinLnBrk="0" hangingPunct="1">
+      <a:defRPr sz="1200" kern="1200">
+        <a:solidFill>
+          <a:schemeClr val="tx1"/>
+        </a:solidFill>
+        <a:latin typeface="+mn-lt"/>
+        <a:ea typeface="+mn-ea"/>
+        <a:cs typeface="+mn-cs"/>
+      </a:defRPr>
+    </a:lvl7pPr>
+    <a:lvl8pPr marL="3200400" algn="l" defTabSz="914400" rtl="0" eaLnBrk="1" latinLnBrk="0" hangingPunct="1">
+      <a:defRPr sz="1200" kern="1200">
+        <a:solidFill>
+          <a:schemeClr val="tx1"/>
+        </a:solidFill>
+        <a:latin typeface="+mn-lt"/>
+        <a:ea typeface="+mn-ea"/>
+        <a:cs typeface="+mn-cs"/>
+      </a:defRPr>
+    </a:lvl8pPr>
+    <a:lvl9pPr marL="3657600" algn="l" defTabSz="914400" rtl="0" eaLnBrk="1" latinLnBrk="0" hangingPunct="1">
+      <a:defRPr sz="1200" kern="1200">
+        <a:solidFill>
+          <a:schemeClr val="tx1"/>
+        </a:solidFill>
+        <a:latin typeface="+mn-lt"/>
+        <a:ea typeface="+mn-ea"/>
+        <a:cs typeface="+mn-cs"/>
+      </a:defRPr>
+    </a:lvl9pPr>
+  </p:notesStyle>
+</p:notesMaster>
+</file>
+
+<file path=ppt/notesSlides/notesSlide1.xml><?xml version="1.0" encoding="utf-8"?>
+<p:notes xmlns:a="http://schemas.openxmlformats.org/drawingml/2006/main" xmlns:r="http://schemas.openxmlformats.org/officeDocument/2006/relationships" xmlns:p="http://schemas.openxmlformats.org/presentationml/2006/main">
+  <p:cSld>
+    <p:spTree>
+      <p:nvGrpSpPr>
+        <p:cNvPr id="1" name=""/>
+        <p:cNvGrpSpPr/>
+        <p:nvPr/>
+      </p:nvGrpSpPr>
+      <p:grpSpPr>
+        <a:xfrm>
+          <a:off x="0" y="0"/>
+          <a:ext cx="0" cy="0"/>
+          <a:chOff x="0" y="0"/>
+          <a:chExt cx="0" cy="0"/>
+        </a:xfrm>
+      </p:grpSpPr>
+      <p:sp>
+        <p:nvSpPr>
+          <p:cNvPr id="2" name="Slide Image Placeholder 1"/>
+          <p:cNvSpPr>
+            <a:spLocks noGrp="1" noRot="1" noChangeAspect="1"/>
+          </p:cNvSpPr>
+          <p:nvPr>
+            <p:ph type="sldImg"/>
+          </p:nvPr>
+        </p:nvSpPr>
+        <p:spPr/>
+      </p:sp>
+      <p:sp>
+        <p:nvSpPr>
+          <p:cNvPr id="3" name="Notes Placeholder 2"/>
+          <p:cNvSpPr>
+            <a:spLocks noGrp="1"/>
+          </p:cNvSpPr>
+          <p:nvPr>
+            <p:ph type="body" idx="1"/>
+          </p:nvPr>
+        </p:nvSpPr>
+        <p:spPr/>
+        <p:txBody>
+          <a:bodyPr/>
+          <a:lstStyle/>
+          <a:p>
+            <a:endParaRPr lang="en-IN" dirty="0"/>
+          </a:p>
+        </p:txBody>
+      </p:sp>
+      <p:sp>
+        <p:nvSpPr>
+          <p:cNvPr id="4" name="Slide Number Placeholder 3"/>
+          <p:cNvSpPr>
+            <a:spLocks noGrp="1"/>
+          </p:cNvSpPr>
+          <p:nvPr>
+            <p:ph type="sldNum" sz="quarter" idx="5"/>
+          </p:nvPr>
+        </p:nvSpPr>
+        <p:spPr/>
+        <p:txBody>
+          <a:bodyPr/>
+          <a:lstStyle/>
+          <a:p>
+            <a:fld id="{F7212A89-67CF-46C4-8032-13E00BEA7EAA}" type="slidenum">
+              <a:rPr lang="en-IN" smtClean="0"/>
+              <a:t>8</a:t>
+            </a:fld>
+            <a:endParaRPr lang="en-IN"/>
+          </a:p>
+        </p:txBody>
+      </p:sp>
+    </p:spTree>
+    <p:extLst>
+      <p:ext uri="{BB962C8B-B14F-4D97-AF65-F5344CB8AC3E}">
+        <p14:creationId xmlns:p14="http://schemas.microsoft.com/office/powerpoint/2010/main" val="1529932609"/>
+      </p:ext>
+    </p:extLst>
+  </p:cSld>
+  <p:clrMapOvr>
+    <a:masterClrMapping/>
+  </p:clrMapOvr>
+</p:notes>
+</file>
+
 <file path=ppt/slideLayouts/slideLayout1.xml><?xml version="1.0" encoding="utf-8"?>
 <p:sldLayout xmlns:a="http://schemas.openxmlformats.org/drawingml/2006/main" xmlns:r="http://schemas.openxmlformats.org/officeDocument/2006/relationships" xmlns:p="http://schemas.openxmlformats.org/presentationml/2006/main" type="title" preserve="1">
   <p:cSld name="Title Slide">
@@ -315,7 +752,7 @@
           <a:p>
             <a:fld id="{5BCAD085-E8A6-8845-BD4E-CB4CCA059FC4}" type="datetimeFigureOut">
               <a:rPr lang="en-US" smtClean="0"/>
-              <a:t>8/28/2026</a:t>
+              <a:t>8/27/2026</a:t>
             </a:fld>
             <a:endParaRPr lang="en-US"/>
           </a:p>
@@ -483,7 +920,7 @@
           <a:p>
             <a:fld id="{5BCAD085-E8A6-8845-BD4E-CB4CCA059FC4}" type="datetimeFigureOut">
               <a:rPr lang="en-US" smtClean="0"/>
-              <a:t>8/28/2026</a:t>
+              <a:t>8/27/2026</a:t>
             </a:fld>
             <a:endParaRPr lang="en-US"/>
           </a:p>
@@ -661,7 +1098,7 @@
           <a:p>
             <a:fld id="{5BCAD085-E8A6-8845-BD4E-CB4CCA059FC4}" type="datetimeFigureOut">
               <a:rPr lang="en-US" smtClean="0"/>
-              <a:t>8/28/2026</a:t>
+              <a:t>8/27/2026</a:t>
             </a:fld>
             <a:endParaRPr lang="en-US"/>
           </a:p>
@@ -829,7 +1266,7 @@
           <a:p>
             <a:fld id="{5BCAD085-E8A6-8845-BD4E-CB4CCA059FC4}" type="datetimeFigureOut">
               <a:rPr lang="en-US" smtClean="0"/>
-              <a:t>8/28/2026</a:t>
+              <a:t>8/27/2026</a:t>
             </a:fld>
             <a:endParaRPr lang="en-US"/>
           </a:p>
@@ -1074,7 +1511,7 @@
           <a:p>
             <a:fld id="{5BCAD085-E8A6-8845-BD4E-CB4CCA059FC4}" type="datetimeFigureOut">
               <a:rPr lang="en-US" smtClean="0"/>
-              <a:t>8/28/2026</a:t>
+              <a:t>8/27/2026</a:t>
             </a:fld>
             <a:endParaRPr lang="en-US"/>
           </a:p>
@@ -1359,7 +1796,7 @@
           <a:p>
             <a:fld id="{5BCAD085-E8A6-8845-BD4E-CB4CCA059FC4}" type="datetimeFigureOut">
               <a:rPr lang="en-US" smtClean="0"/>
-              <a:t>8/28/2026</a:t>
+              <a:t>8/27/2026</a:t>
             </a:fld>
             <a:endParaRPr lang="en-US"/>
           </a:p>
@@ -1778,7 +2215,7 @@
           <a:p>
             <a:fld id="{5BCAD085-E8A6-8845-BD4E-CB4CCA059FC4}" type="datetimeFigureOut">
               <a:rPr lang="en-US" smtClean="0"/>
-              <a:t>8/28/2026</a:t>
+              <a:t>8/27/2026</a:t>
             </a:fld>
             <a:endParaRPr lang="en-US"/>
           </a:p>
@@ -1895,7 +2332,7 @@
           <a:p>
             <a:fld id="{5BCAD085-E8A6-8845-BD4E-CB4CCA059FC4}" type="datetimeFigureOut">
               <a:rPr lang="en-US" smtClean="0"/>
-              <a:t>8/28/2026</a:t>
+              <a:t>8/27/2026</a:t>
             </a:fld>
             <a:endParaRPr lang="en-US"/>
           </a:p>
@@ -1990,7 +2427,7 @@
           <a:p>
             <a:fld id="{5BCAD085-E8A6-8845-BD4E-CB4CCA059FC4}" type="datetimeFigureOut">
               <a:rPr lang="en-US" smtClean="0"/>
-              <a:t>8/28/2026</a:t>
+              <a:t>8/27/2026</a:t>
             </a:fld>
             <a:endParaRPr lang="en-US"/>
           </a:p>
@@ -2265,7 +2702,7 @@
           <a:p>
             <a:fld id="{5BCAD085-E8A6-8845-BD4E-CB4CCA059FC4}" type="datetimeFigureOut">
               <a:rPr lang="en-US" smtClean="0"/>
-              <a:t>8/28/2026</a:t>
+              <a:t>8/27/2026</a:t>
             </a:fld>
             <a:endParaRPr lang="en-US"/>
           </a:p>
@@ -2517,7 +2954,7 @@
           <a:p>
             <a:fld id="{5BCAD085-E8A6-8845-BD4E-CB4CCA059FC4}" type="datetimeFigureOut">
               <a:rPr lang="en-US" smtClean="0"/>
-              <a:t>8/28/2026</a:t>
+              <a:t>8/27/2026</a:t>
             </a:fld>
             <a:endParaRPr lang="en-US"/>
           </a:p>
@@ -2728,7 +3165,7 @@
           <a:p>
             <a:fld id="{5BCAD085-E8A6-8845-BD4E-CB4CCA059FC4}" type="datetimeFigureOut">
               <a:rPr lang="en-US" smtClean="0"/>
-              <a:t>8/28/2026</a:t>
+              <a:t>8/27/2026</a:t>
             </a:fld>
             <a:endParaRPr lang="en-US"/>
           </a:p>
@@ -3111,7 +3548,7 @@
         </p:nvSpPr>
         <p:spPr>
           <a:xfrm>
-            <a:off x="1985495" y="1494918"/>
+            <a:off x="2168375" y="1645920"/>
             <a:ext cx="7824770" cy="615553"/>
           </a:xfrm>
           <a:prstGeom prst="rect">
@@ -3146,8 +3583,8 @@
         </p:nvSpPr>
         <p:spPr>
           <a:xfrm>
-            <a:off x="3892492" y="2608976"/>
-            <a:ext cx="4090039" cy="1015663"/>
+            <a:off x="4201880" y="2926080"/>
+            <a:ext cx="3757760" cy="1015663"/>
           </a:xfrm>
           <a:prstGeom prst="rect">
             <a:avLst/>
@@ -3155,7 +3592,7 @@
           <a:noFill/>
         </p:spPr>
         <p:txBody>
-          <a:bodyPr wrap="square">
+          <a:bodyPr wrap="none">
             <a:spAutoFit/>
           </a:bodyPr>
           <a:lstStyle/>
@@ -3168,21 +3605,7 @@
                 <a:latin typeface="Times New Roman" panose="02020603050405020304" pitchFamily="18" charset="0"/>
                 <a:cs typeface="Times New Roman" panose="02020603050405020304" pitchFamily="18" charset="0"/>
               </a:rPr>
-              <a:t>Apex</a:t>
-            </a:r>
-            <a:r>
-              <a:rPr lang="en-US" dirty="0">
-                <a:latin typeface="Times New Roman" panose="02020603050405020304" pitchFamily="18" charset="0"/>
-                <a:cs typeface="Times New Roman" panose="02020603050405020304" pitchFamily="18" charset="0"/>
-              </a:rPr>
-              <a:t> </a:t>
-            </a:r>
-            <a:r>
-              <a:rPr dirty="0">
-                <a:latin typeface="Times New Roman" panose="02020603050405020304" pitchFamily="18" charset="0"/>
-                <a:cs typeface="Times New Roman" panose="02020603050405020304" pitchFamily="18" charset="0"/>
-              </a:rPr>
-              <a:t>Planet Internship – Task 4</a:t>
+              <a:t>ApexPlanet Internship – Task 4</a:t>
             </a:r>
           </a:p>
           <a:p>
@@ -3202,18 +3625,18 @@
               <a:defRPr sz="1600"/>
             </a:pPr>
             <a:r>
-              <a:rPr dirty="0">
+              <a:rPr b="1" dirty="0">
                 <a:latin typeface="Times New Roman" panose="02020603050405020304" pitchFamily="18" charset="0"/>
                 <a:cs typeface="Times New Roman" panose="02020603050405020304" pitchFamily="18" charset="0"/>
               </a:rPr>
               <a:t>Presented by: </a:t>
             </a:r>
             <a:r>
-              <a:rPr lang="en-US" dirty="0">
-                <a:latin typeface="Times New Roman" panose="02020603050405020304" pitchFamily="18" charset="0"/>
-                <a:cs typeface="Times New Roman" panose="02020603050405020304" pitchFamily="18" charset="0"/>
-              </a:rPr>
-              <a:t>Sriramoju Tejaswini</a:t>
+              <a:rPr lang="en-IN" dirty="0">
+                <a:latin typeface="Times New Roman" panose="02020603050405020304" pitchFamily="18" charset="0"/>
+                <a:cs typeface="Times New Roman" panose="02020603050405020304" pitchFamily="18" charset="0"/>
+              </a:rPr>
+              <a:t>Supriya Enjam</a:t>
             </a:r>
             <a:endParaRPr dirty="0">
               <a:latin typeface="Times New Roman" panose="02020603050405020304" pitchFamily="18" charset="0"/>
@@ -3485,7 +3908,7 @@
         </p:nvSpPr>
         <p:spPr>
           <a:xfrm>
-            <a:off x="640080" y="411480"/>
+            <a:off x="594360" y="320040"/>
             <a:ext cx="6914072" cy="523220"/>
           </a:xfrm>
           <a:prstGeom prst="rect">
@@ -3520,8 +3943,8 @@
         </p:nvSpPr>
         <p:spPr>
           <a:xfrm>
-            <a:off x="640080" y="934700"/>
-            <a:ext cx="10850880" cy="2169825"/>
+            <a:off x="469982" y="843260"/>
+            <a:ext cx="10789920" cy="2462213"/>
           </a:xfrm>
           <a:prstGeom prst="rect">
             <a:avLst/>
@@ -3534,10 +3957,12 @@
           </a:bodyPr>
           <a:lstStyle/>
           <a:p>
-            <a:pPr>
+            <a:pPr marL="342900" indent="-342900">
               <a:spcAft>
                 <a:spcPts val="1200"/>
               </a:spcAft>
+              <a:buFont typeface="Arial" panose="020B0604020202020204" pitchFamily="34" charset="0"/>
+              <a:buChar char="•"/>
               <a:defRPr sz="1900"/>
             </a:pPr>
             <a:r>
@@ -3545,58 +3970,64 @@
                 <a:latin typeface="Times New Roman" panose="02020603050405020304" pitchFamily="18" charset="0"/>
                 <a:cs typeface="Times New Roman" panose="02020603050405020304" pitchFamily="18" charset="0"/>
               </a:rPr>
-              <a:t>Interactive </a:t>
-            </a:r>
-            <a:r>
-              <a:rPr dirty="0" err="1">
-                <a:latin typeface="Times New Roman" panose="02020603050405020304" pitchFamily="18" charset="0"/>
-                <a:cs typeface="Times New Roman" panose="02020603050405020304" pitchFamily="18" charset="0"/>
-              </a:rPr>
-              <a:t>Streamlit</a:t>
-            </a:r>
-            <a:r>
-              <a:rPr dirty="0">
-                <a:latin typeface="Times New Roman" panose="02020603050405020304" pitchFamily="18" charset="0"/>
-                <a:cs typeface="Times New Roman" panose="02020603050405020304" pitchFamily="18" charset="0"/>
-              </a:rPr>
-              <a:t> dashboard developed in Task 3.</a:t>
-            </a:r>
-          </a:p>
-          <a:p>
-            <a:pPr>
+              <a:t>Interactive Streamlit dashboard developed in Task 3.</a:t>
+            </a:r>
+          </a:p>
+          <a:p>
+            <a:pPr marL="342900" indent="-342900">
               <a:spcAft>
                 <a:spcPts val="1200"/>
               </a:spcAft>
+              <a:buFont typeface="Arial" panose="020B0604020202020204" pitchFamily="34" charset="0"/>
+              <a:buChar char="•"/>
               <a:defRPr sz="1900"/>
             </a:pPr>
             <a:r>
+              <a:rPr b="1" dirty="0">
+                <a:latin typeface="Times New Roman" panose="02020603050405020304" pitchFamily="18" charset="0"/>
+                <a:cs typeface="Times New Roman" panose="02020603050405020304" pitchFamily="18" charset="0"/>
+              </a:rPr>
+              <a:t>Filters: </a:t>
+            </a:r>
+            <a:r>
               <a:rPr dirty="0">
                 <a:latin typeface="Times New Roman" panose="02020603050405020304" pitchFamily="18" charset="0"/>
                 <a:cs typeface="Times New Roman" panose="02020603050405020304" pitchFamily="18" charset="0"/>
               </a:rPr>
-              <a:t>Filters: Gender, Category, City, and Date.</a:t>
-            </a:r>
-          </a:p>
-          <a:p>
-            <a:pPr>
+              <a:t>Gender, Category, City, and Date.</a:t>
+            </a:r>
+          </a:p>
+          <a:p>
+            <a:pPr marL="342900" indent="-342900">
               <a:spcAft>
                 <a:spcPts val="1200"/>
               </a:spcAft>
+              <a:buFont typeface="Arial" panose="020B0604020202020204" pitchFamily="34" charset="0"/>
+              <a:buChar char="•"/>
               <a:defRPr sz="1900"/>
             </a:pPr>
             <a:r>
+              <a:rPr b="1" dirty="0">
+                <a:latin typeface="Times New Roman" panose="02020603050405020304" pitchFamily="18" charset="0"/>
+                <a:cs typeface="Times New Roman" panose="02020603050405020304" pitchFamily="18" charset="0"/>
+              </a:rPr>
+              <a:t>Visuals: </a:t>
+            </a:r>
+            <a:r>
               <a:rPr dirty="0">
                 <a:latin typeface="Times New Roman" panose="02020603050405020304" pitchFamily="18" charset="0"/>
                 <a:cs typeface="Times New Roman" panose="02020603050405020304" pitchFamily="18" charset="0"/>
               </a:rPr>
-              <a:t>Visuals: sales by category, sales by city, monthly sales trend, customer segmentation, and product analysis.</a:t>
-            </a:r>
-          </a:p>
-          <a:p>
-            <a:pPr>
+              <a:t>sales by category, sales by city, monthly sales trend, customer segmentation, and product analysis.</a:t>
+            </a:r>
+          </a:p>
+          <a:p>
+            <a:pPr marL="342900" indent="-342900">
               <a:spcAft>
                 <a:spcPts val="1200"/>
               </a:spcAft>
+              <a:buFont typeface="Arial" panose="020B0604020202020204" pitchFamily="34" charset="0"/>
+              <a:buChar char="•"/>
               <a:defRPr sz="1900"/>
             </a:pPr>
             <a:r>
@@ -3608,33 +4039,25 @@
             </a:r>
           </a:p>
           <a:p>
-            <a:pPr>
+            <a:pPr marL="342900" indent="-342900">
               <a:spcAft>
                 <a:spcPts val="1200"/>
               </a:spcAft>
+              <a:buFont typeface="Arial" panose="020B0604020202020204" pitchFamily="34" charset="0"/>
+              <a:buChar char="•"/>
               <a:defRPr sz="1900"/>
             </a:pPr>
             <a:r>
-              <a:rPr dirty="0">
-                <a:latin typeface="Times New Roman" panose="02020603050405020304" pitchFamily="18" charset="0"/>
-                <a:cs typeface="Times New Roman" panose="02020603050405020304" pitchFamily="18" charset="0"/>
-              </a:rPr>
-              <a:t>Recommended visual: insert a screenshot of your live </a:t>
-            </a:r>
-            <a:r>
-              <a:rPr dirty="0" err="1">
-                <a:latin typeface="Times New Roman" panose="02020603050405020304" pitchFamily="18" charset="0"/>
-                <a:cs typeface="Times New Roman" panose="02020603050405020304" pitchFamily="18" charset="0"/>
-              </a:rPr>
-              <a:t>Streamlit</a:t>
-            </a:r>
-            <a:r>
-              <a:rPr dirty="0">
-                <a:latin typeface="Times New Roman" panose="02020603050405020304" pitchFamily="18" charset="0"/>
-                <a:cs typeface="Times New Roman" panose="02020603050405020304" pitchFamily="18" charset="0"/>
-              </a:rPr>
-              <a:t> dashboard.</a:t>
-            </a:r>
+              <a:rPr b="1" dirty="0">
+                <a:latin typeface="Times New Roman" panose="02020603050405020304" pitchFamily="18" charset="0"/>
+                <a:cs typeface="Times New Roman" panose="02020603050405020304" pitchFamily="18" charset="0"/>
+              </a:rPr>
+              <a:t>Recommended visual:</a:t>
+            </a:r>
+            <a:endParaRPr dirty="0">
+              <a:latin typeface="Times New Roman" panose="02020603050405020304" pitchFamily="18" charset="0"/>
+              <a:cs typeface="Times New Roman" panose="02020603050405020304" pitchFamily="18" charset="0"/>
+            </a:endParaRPr>
           </a:p>
         </p:txBody>
       </p:sp>
@@ -3674,7 +4097,7 @@
           <p:cNvPr id="6" name="Picture 5">
             <a:extLst>
               <a:ext uri="{FF2B5EF4-FFF2-40B4-BE49-F238E27FC236}">
-                <a16:creationId xmlns:a16="http://schemas.microsoft.com/office/drawing/2014/main" id="{B1A898DF-6781-7237-C9AE-E1607FF8D370}"/>
+                <a16:creationId xmlns:a16="http://schemas.microsoft.com/office/drawing/2014/main" id="{8466E590-0EE1-B0B0-AF26-DA8B47213C4B}"/>
               </a:ext>
             </a:extLst>
           </p:cNvPr>
@@ -3691,8 +4114,8 @@
         </p:blipFill>
         <p:spPr>
           <a:xfrm>
-            <a:off x="2072081" y="3104525"/>
-            <a:ext cx="7306812" cy="3753475"/>
+            <a:off x="3312224" y="3054704"/>
+            <a:ext cx="7168964" cy="3391816"/>
           </a:xfrm>
           <a:prstGeom prst="rect">
             <a:avLst/>
@@ -3818,11 +4241,18 @@
               <a:defRPr sz="1900"/>
             </a:pPr>
             <a:r>
+              <a:rPr b="1" dirty="0">
+                <a:latin typeface="Times New Roman" panose="02020603050405020304" pitchFamily="18" charset="0"/>
+                <a:cs typeface="Times New Roman" panose="02020603050405020304" pitchFamily="18" charset="0"/>
+              </a:rPr>
+              <a:t>Main takeaway: </a:t>
+            </a:r>
+            <a:r>
               <a:rPr dirty="0">
                 <a:latin typeface="Times New Roman" panose="02020603050405020304" pitchFamily="18" charset="0"/>
                 <a:cs typeface="Times New Roman" panose="02020603050405020304" pitchFamily="18" charset="0"/>
               </a:rPr>
-              <a:t>Main takeaway: Data analysis becomes valuable when insights are translated into measurable business actions.</a:t>
+              <a:t>Data analysis becomes valuable when insights are translated into measurable business actions.</a:t>
             </a:r>
           </a:p>
         </p:txBody>
@@ -4142,8 +4572,8 @@
         </p:nvSpPr>
         <p:spPr>
           <a:xfrm>
-            <a:off x="1613031" y="2971800"/>
-            <a:ext cx="8935458" cy="923330"/>
+            <a:off x="1556894" y="2971800"/>
+            <a:ext cx="9047733" cy="923330"/>
           </a:xfrm>
           <a:prstGeom prst="rect">
             <a:avLst/>
@@ -4164,21 +4594,7 @@
                 <a:latin typeface="Times New Roman" panose="02020603050405020304" pitchFamily="18" charset="0"/>
                 <a:cs typeface="Times New Roman" panose="02020603050405020304" pitchFamily="18" charset="0"/>
               </a:rPr>
-              <a:t>Apex</a:t>
-            </a:r>
-            <a:r>
-              <a:rPr lang="en-US" dirty="0">
-                <a:latin typeface="Times New Roman" panose="02020603050405020304" pitchFamily="18" charset="0"/>
-                <a:cs typeface="Times New Roman" panose="02020603050405020304" pitchFamily="18" charset="0"/>
-              </a:rPr>
-              <a:t> </a:t>
-            </a:r>
-            <a:r>
-              <a:rPr dirty="0">
-                <a:latin typeface="Times New Roman" panose="02020603050405020304" pitchFamily="18" charset="0"/>
-                <a:cs typeface="Times New Roman" panose="02020603050405020304" pitchFamily="18" charset="0"/>
-              </a:rPr>
-              <a:t>Planet Software Pvt. Ltd. Internship</a:t>
+              <a:t>ApexPlanet Software Pvt. Ltd. Internship</a:t>
             </a:r>
           </a:p>
           <a:p>
@@ -4198,24 +4614,30 @@
               <a:defRPr sz="1700"/>
             </a:pPr>
             <a:r>
+              <a:rPr>
+                <a:latin typeface="Times New Roman" panose="02020603050405020304" pitchFamily="18" charset="0"/>
+                <a:cs typeface="Times New Roman" panose="02020603050405020304" pitchFamily="18" charset="0"/>
+              </a:rPr>
+              <a:t>Live </a:t>
+            </a:r>
+            <a:r>
               <a:rPr dirty="0">
                 <a:latin typeface="Times New Roman" panose="02020603050405020304" pitchFamily="18" charset="0"/>
                 <a:cs typeface="Times New Roman" panose="02020603050405020304" pitchFamily="18" charset="0"/>
               </a:rPr>
-              <a:t>Live Dashboard:</a:t>
+              <a:t>Dashboard</a:t>
+            </a:r>
+            <a:r>
+              <a:rPr dirty="0"/>
+              <a:t>:</a:t>
             </a:r>
             <a:r>
               <a:rPr lang="en-IN" dirty="0">
-                <a:latin typeface="Times New Roman" panose="02020603050405020304" pitchFamily="18" charset="0"/>
-                <a:cs typeface="Times New Roman" panose="02020603050405020304" pitchFamily="18" charset="0"/>
                 <a:hlinkClick r:id="rId2"/>
               </a:rPr>
-              <a:t>https://apexplanettask3deepdiveanalysisgit-3dh98zecwbq7zbf2abzrrc.streamlit.app/</a:t>
-            </a:r>
-            <a:endParaRPr dirty="0">
-              <a:latin typeface="Times New Roman" panose="02020603050405020304" pitchFamily="18" charset="0"/>
-              <a:cs typeface="Times New Roman" panose="02020603050405020304" pitchFamily="18" charset="0"/>
-            </a:endParaRPr>
+              <a:t>https://apexplanettask3deepdiveanalysis-bhdfudutd3hhzys2newndw.streamlit.app/</a:t>
+            </a:r>
+            <a:endParaRPr dirty="0"/>
           </a:p>
         </p:txBody>
       </p:sp>
@@ -4283,8 +4705,8 @@
         </p:nvSpPr>
         <p:spPr>
           <a:xfrm>
-            <a:off x="640080" y="320040"/>
-            <a:ext cx="3109799" cy="523220"/>
+            <a:off x="594360" y="320040"/>
+            <a:ext cx="3065263" cy="523220"/>
           </a:xfrm>
           <a:prstGeom prst="rect">
             <a:avLst/>
@@ -4292,7 +4714,7 @@
           <a:noFill/>
         </p:spPr>
         <p:txBody>
-          <a:bodyPr wrap="square">
+          <a:bodyPr wrap="none">
             <a:spAutoFit/>
           </a:bodyPr>
           <a:lstStyle/>
@@ -4318,7 +4740,7 @@
         </p:nvSpPr>
         <p:spPr>
           <a:xfrm>
-            <a:off x="640080" y="1259175"/>
+            <a:off x="731520" y="1234440"/>
             <a:ext cx="10789920" cy="2169825"/>
           </a:xfrm>
           <a:prstGeom prst="rect">
@@ -4482,8 +4904,8 @@
         </p:nvSpPr>
         <p:spPr>
           <a:xfrm>
-            <a:off x="731519" y="320040"/>
-            <a:ext cx="3320363" cy="523220"/>
+            <a:off x="594360" y="320040"/>
+            <a:ext cx="2904962" cy="523220"/>
           </a:xfrm>
           <a:prstGeom prst="rect">
             <a:avLst/>
@@ -4491,7 +4913,7 @@
           <a:noFill/>
         </p:spPr>
         <p:txBody>
-          <a:bodyPr wrap="square">
+          <a:bodyPr wrap="none">
             <a:spAutoFit/>
           </a:bodyPr>
           <a:lstStyle/>
@@ -4640,7 +5062,11 @@
                 <a:latin typeface="Times New Roman" panose="02020603050405020304" pitchFamily="18" charset="0"/>
                 <a:cs typeface="Times New Roman" panose="02020603050405020304" pitchFamily="18" charset="0"/>
               </a:rPr>
-              <a:t>sales performance, customer behavior, products/categories, cities, and trends.</a:t>
+              <a:t>sales performance, customer behavior, products/categories, cities, and trends</a:t>
+            </a:r>
+            <a:r>
+              <a:rPr dirty="0"/>
+              <a:t>.</a:t>
             </a:r>
           </a:p>
         </p:txBody>
@@ -4709,8 +5135,8 @@
         </p:nvSpPr>
         <p:spPr>
           <a:xfrm>
-            <a:off x="731520" y="320040"/>
-            <a:ext cx="3345530" cy="523220"/>
+            <a:off x="594360" y="320040"/>
+            <a:ext cx="3207866" cy="523220"/>
           </a:xfrm>
           <a:prstGeom prst="rect">
             <a:avLst/>
@@ -4718,7 +5144,7 @@
           <a:noFill/>
         </p:spPr>
         <p:txBody>
-          <a:bodyPr wrap="square">
+          <a:bodyPr wrap="none">
             <a:spAutoFit/>
           </a:bodyPr>
           <a:lstStyle/>
@@ -4767,25 +5193,18 @@
               <a:defRPr sz="1900"/>
             </a:pPr>
             <a:r>
+              <a:rPr b="1" dirty="0">
+                <a:latin typeface="Times New Roman" panose="02020603050405020304" pitchFamily="18" charset="0"/>
+                <a:cs typeface="Times New Roman" panose="02020603050405020304" pitchFamily="18" charset="0"/>
+              </a:rPr>
+              <a:t>Total Sales </a:t>
+            </a:r>
+            <a:r>
               <a:rPr dirty="0">
                 <a:latin typeface="Times New Roman" panose="02020603050405020304" pitchFamily="18" charset="0"/>
                 <a:cs typeface="Times New Roman" panose="02020603050405020304" pitchFamily="18" charset="0"/>
               </a:rPr>
-              <a:t>Total Sales — Sum of </a:t>
-            </a:r>
-            <a:r>
-              <a:rPr dirty="0" err="1">
-                <a:latin typeface="Times New Roman" panose="02020603050405020304" pitchFamily="18" charset="0"/>
-                <a:cs typeface="Times New Roman" panose="02020603050405020304" pitchFamily="18" charset="0"/>
-              </a:rPr>
-              <a:t>Total_Sales</a:t>
-            </a:r>
-            <a:r>
-              <a:rPr dirty="0">
-                <a:latin typeface="Times New Roman" panose="02020603050405020304" pitchFamily="18" charset="0"/>
-                <a:cs typeface="Times New Roman" panose="02020603050405020304" pitchFamily="18" charset="0"/>
-              </a:rPr>
-              <a:t> — measures overall revenue generated.</a:t>
+              <a:t>— Sum of Total_Sales — measures overall revenue generated.</a:t>
             </a:r>
           </a:p>
           <a:p>
@@ -4798,25 +5217,18 @@
               <a:defRPr sz="1900"/>
             </a:pPr>
             <a:r>
+              <a:rPr b="1" dirty="0">
+                <a:latin typeface="Times New Roman" panose="02020603050405020304" pitchFamily="18" charset="0"/>
+                <a:cs typeface="Times New Roman" panose="02020603050405020304" pitchFamily="18" charset="0"/>
+              </a:rPr>
+              <a:t>Total Orders </a:t>
+            </a:r>
+            <a:r>
               <a:rPr dirty="0">
                 <a:latin typeface="Times New Roman" panose="02020603050405020304" pitchFamily="18" charset="0"/>
                 <a:cs typeface="Times New Roman" panose="02020603050405020304" pitchFamily="18" charset="0"/>
               </a:rPr>
-              <a:t>Total Orders — Count of unique </a:t>
-            </a:r>
-            <a:r>
-              <a:rPr dirty="0" err="1">
-                <a:latin typeface="Times New Roman" panose="02020603050405020304" pitchFamily="18" charset="0"/>
-                <a:cs typeface="Times New Roman" panose="02020603050405020304" pitchFamily="18" charset="0"/>
-              </a:rPr>
-              <a:t>Order_ID</a:t>
-            </a:r>
-            <a:r>
-              <a:rPr dirty="0">
-                <a:latin typeface="Times New Roman" panose="02020603050405020304" pitchFamily="18" charset="0"/>
-                <a:cs typeface="Times New Roman" panose="02020603050405020304" pitchFamily="18" charset="0"/>
-              </a:rPr>
-              <a:t> — measures order volume.</a:t>
+              <a:t>— Count of unique Order_ID — measures order volume.</a:t>
             </a:r>
           </a:p>
           <a:p>
@@ -4829,25 +5241,18 @@
               <a:defRPr sz="1900"/>
             </a:pPr>
             <a:r>
+              <a:rPr b="1" dirty="0">
+                <a:latin typeface="Times New Roman" panose="02020603050405020304" pitchFamily="18" charset="0"/>
+                <a:cs typeface="Times New Roman" panose="02020603050405020304" pitchFamily="18" charset="0"/>
+              </a:rPr>
+              <a:t>Total Customers </a:t>
+            </a:r>
+            <a:r>
               <a:rPr dirty="0">
                 <a:latin typeface="Times New Roman" panose="02020603050405020304" pitchFamily="18" charset="0"/>
                 <a:cs typeface="Times New Roman" panose="02020603050405020304" pitchFamily="18" charset="0"/>
               </a:rPr>
-              <a:t>Total Customers — Count of unique </a:t>
-            </a:r>
-            <a:r>
-              <a:rPr dirty="0" err="1">
-                <a:latin typeface="Times New Roman" panose="02020603050405020304" pitchFamily="18" charset="0"/>
-                <a:cs typeface="Times New Roman" panose="02020603050405020304" pitchFamily="18" charset="0"/>
-              </a:rPr>
-              <a:t>Customer_ID</a:t>
-            </a:r>
-            <a:r>
-              <a:rPr dirty="0">
-                <a:latin typeface="Times New Roman" panose="02020603050405020304" pitchFamily="18" charset="0"/>
-                <a:cs typeface="Times New Roman" panose="02020603050405020304" pitchFamily="18" charset="0"/>
-              </a:rPr>
-              <a:t> — measures customer base.</a:t>
+              <a:t>— Count of unique Customer_ID — measures customer base.</a:t>
             </a:r>
           </a:p>
           <a:p>
@@ -4860,11 +5265,18 @@
               <a:defRPr sz="1900"/>
             </a:pPr>
             <a:r>
+              <a:rPr b="1" dirty="0">
+                <a:latin typeface="Times New Roman" panose="02020603050405020304" pitchFamily="18" charset="0"/>
+                <a:cs typeface="Times New Roman" panose="02020603050405020304" pitchFamily="18" charset="0"/>
+              </a:rPr>
+              <a:t>Average Order Value </a:t>
+            </a:r>
+            <a:r>
               <a:rPr dirty="0">
                 <a:latin typeface="Times New Roman" panose="02020603050405020304" pitchFamily="18" charset="0"/>
                 <a:cs typeface="Times New Roman" panose="02020603050405020304" pitchFamily="18" charset="0"/>
               </a:rPr>
-              <a:t>Average Order Value — Total Sales ÷ Total Orders — measures average value per order.</a:t>
+              <a:t>— Total Sales ÷ Total Orders — measures average value per order.</a:t>
             </a:r>
           </a:p>
           <a:p>
@@ -4877,11 +5289,18 @@
               <a:defRPr sz="1900"/>
             </a:pPr>
             <a:r>
+              <a:rPr b="1" dirty="0">
+                <a:latin typeface="Times New Roman" panose="02020603050405020304" pitchFamily="18" charset="0"/>
+                <a:cs typeface="Times New Roman" panose="02020603050405020304" pitchFamily="18" charset="0"/>
+              </a:rPr>
+              <a:t>Total Quantity </a:t>
+            </a:r>
+            <a:r>
               <a:rPr dirty="0">
                 <a:latin typeface="Times New Roman" panose="02020603050405020304" pitchFamily="18" charset="0"/>
                 <a:cs typeface="Times New Roman" panose="02020603050405020304" pitchFamily="18" charset="0"/>
               </a:rPr>
-              <a:t>Total Quantity — Sum of Quantity — measures products sold.</a:t>
+              <a:t>— Sum of Quantity — measures products sold.</a:t>
             </a:r>
           </a:p>
         </p:txBody>
@@ -4950,8 +5369,8 @@
         </p:nvSpPr>
         <p:spPr>
           <a:xfrm>
-            <a:off x="796953" y="320040"/>
-            <a:ext cx="3984771" cy="523220"/>
+            <a:off x="594360" y="320040"/>
+            <a:ext cx="3635932" cy="523220"/>
           </a:xfrm>
           <a:prstGeom prst="rect">
             <a:avLst/>
@@ -4959,7 +5378,7 @@
           <a:noFill/>
         </p:spPr>
         <p:txBody>
-          <a:bodyPr wrap="square">
+          <a:bodyPr wrap="none">
             <a:spAutoFit/>
           </a:bodyPr>
           <a:lstStyle/>
@@ -5184,7 +5603,7 @@
         </p:nvSpPr>
         <p:spPr>
           <a:xfrm>
-            <a:off x="731520" y="1234440"/>
+            <a:off x="594360" y="843260"/>
             <a:ext cx="10789920" cy="2169825"/>
           </a:xfrm>
           <a:prstGeom prst="rect">
@@ -5211,21 +5630,7 @@
                 <a:latin typeface="Times New Roman" panose="02020603050405020304" pitchFamily="18" charset="0"/>
                 <a:cs typeface="Times New Roman" panose="02020603050405020304" pitchFamily="18" charset="0"/>
               </a:rPr>
-              <a:t>Customers were grouped using </a:t>
-            </a:r>
-            <a:r>
-              <a:rPr dirty="0" err="1">
-                <a:latin typeface="Times New Roman" panose="02020603050405020304" pitchFamily="18" charset="0"/>
-                <a:cs typeface="Times New Roman" panose="02020603050405020304" pitchFamily="18" charset="0"/>
-              </a:rPr>
-              <a:t>Customer_ID</a:t>
-            </a:r>
-            <a:r>
-              <a:rPr dirty="0">
-                <a:latin typeface="Times New Roman" panose="02020603050405020304" pitchFamily="18" charset="0"/>
-                <a:cs typeface="Times New Roman" panose="02020603050405020304" pitchFamily="18" charset="0"/>
-              </a:rPr>
-              <a:t> and analyzed at customer level.</a:t>
+              <a:t>Customers were grouped using Customer_ID and analyzed at customer level.</a:t>
             </a:r>
           </a:p>
           <a:p>
@@ -5238,11 +5643,18 @@
               <a:defRPr sz="1900"/>
             </a:pPr>
             <a:r>
+              <a:rPr b="1" dirty="0">
+                <a:latin typeface="Times New Roman" panose="02020603050405020304" pitchFamily="18" charset="0"/>
+                <a:cs typeface="Times New Roman" panose="02020603050405020304" pitchFamily="18" charset="0"/>
+              </a:rPr>
+              <a:t>Metrics used: </a:t>
+            </a:r>
+            <a:r>
               <a:rPr dirty="0">
                 <a:latin typeface="Times New Roman" panose="02020603050405020304" pitchFamily="18" charset="0"/>
                 <a:cs typeface="Times New Roman" panose="02020603050405020304" pitchFamily="18" charset="0"/>
               </a:rPr>
-              <a:t>Metrics used: Total Sales, Total Orders, and Total Quantity.</a:t>
+              <a:t>Total Sales, Total Orders, and Total Quantity.</a:t>
             </a:r>
           </a:p>
           <a:p>
@@ -5255,11 +5667,18 @@
               <a:defRPr sz="1900"/>
             </a:pPr>
             <a:r>
+              <a:rPr b="1" dirty="0">
+                <a:latin typeface="Times New Roman" panose="02020603050405020304" pitchFamily="18" charset="0"/>
+                <a:cs typeface="Times New Roman" panose="02020603050405020304" pitchFamily="18" charset="0"/>
+              </a:rPr>
+              <a:t>Segments: </a:t>
+            </a:r>
+            <a:r>
               <a:rPr dirty="0">
                 <a:latin typeface="Times New Roman" panose="02020603050405020304" pitchFamily="18" charset="0"/>
                 <a:cs typeface="Times New Roman" panose="02020603050405020304" pitchFamily="18" charset="0"/>
               </a:rPr>
-              <a:t>Segments: High Value, Medium Value, and Low Value.</a:t>
+              <a:t>High Value, Medium Value, and Low Value.</a:t>
             </a:r>
           </a:p>
           <a:p>
@@ -5289,18 +5708,11 @@
               <a:defRPr sz="1900"/>
             </a:pPr>
             <a:r>
-              <a:rPr dirty="0">
-                <a:latin typeface="Times New Roman" panose="02020603050405020304" pitchFamily="18" charset="0"/>
-                <a:cs typeface="Times New Roman" panose="02020603050405020304" pitchFamily="18" charset="0"/>
-              </a:rPr>
-              <a:t>Recommended visual:  </a:t>
-            </a:r>
-            <a:r>
-              <a:rPr dirty="0" err="1">
-                <a:latin typeface="Times New Roman" panose="02020603050405020304" pitchFamily="18" charset="0"/>
-                <a:cs typeface="Times New Roman" panose="02020603050405020304" pitchFamily="18" charset="0"/>
-              </a:rPr>
-              <a:t>sales_by_customer_segment</a:t>
+              <a:rPr b="1" dirty="0">
+                <a:latin typeface="Times New Roman" panose="02020603050405020304" pitchFamily="18" charset="0"/>
+                <a:cs typeface="Times New Roman" panose="02020603050405020304" pitchFamily="18" charset="0"/>
+              </a:rPr>
+              <a:t>Recommended visual:</a:t>
             </a:r>
             <a:endParaRPr dirty="0">
               <a:latin typeface="Times New Roman" panose="02020603050405020304" pitchFamily="18" charset="0"/>
@@ -5342,10 +5754,10 @@
       </p:sp>
       <p:pic>
         <p:nvPicPr>
-          <p:cNvPr id="8" name="Picture 7">
+          <p:cNvPr id="6" name="Picture 5">
             <a:extLst>
               <a:ext uri="{FF2B5EF4-FFF2-40B4-BE49-F238E27FC236}">
-                <a16:creationId xmlns:a16="http://schemas.microsoft.com/office/drawing/2014/main" id="{2B767EE3-4DF6-87C4-1F37-7D8476D8FD6B}"/>
+                <a16:creationId xmlns:a16="http://schemas.microsoft.com/office/drawing/2014/main" id="{5B005DD7-276E-EB13-CF13-AC096665D0B1}"/>
               </a:ext>
             </a:extLst>
           </p:cNvPr>
@@ -5362,8 +5774,8 @@
         </p:blipFill>
         <p:spPr>
           <a:xfrm>
-            <a:off x="2608976" y="3453736"/>
-            <a:ext cx="5286842" cy="3242058"/>
+            <a:off x="1368026" y="3013085"/>
+            <a:ext cx="5486664" cy="3429165"/>
           </a:xfrm>
           <a:prstGeom prst="rect">
             <a:avLst/>
@@ -5461,11 +5873,18 @@
               <a:defRPr sz="1900"/>
             </a:pPr>
             <a:r>
+              <a:rPr b="1" dirty="0">
+                <a:latin typeface="Times New Roman" panose="02020603050405020304" pitchFamily="18" charset="0"/>
+                <a:cs typeface="Times New Roman" panose="02020603050405020304" pitchFamily="18" charset="0"/>
+              </a:rPr>
+              <a:t>Business Question: </a:t>
+            </a:r>
+            <a:r>
               <a:rPr dirty="0">
                 <a:latin typeface="Times New Roman" panose="02020603050405020304" pitchFamily="18" charset="0"/>
                 <a:cs typeface="Times New Roman" panose="02020603050405020304" pitchFamily="18" charset="0"/>
               </a:rPr>
-              <a:t>Business Question: Is there a statistically significant difference in average sales between male and female customers?</a:t>
+              <a:t>Is there a statistically significant difference in average sales between male and female customers?</a:t>
             </a:r>
           </a:p>
           <a:p>
@@ -5478,11 +5897,18 @@
               <a:defRPr sz="1900"/>
             </a:pPr>
             <a:r>
+              <a:rPr b="1" dirty="0">
+                <a:latin typeface="Times New Roman" panose="02020603050405020304" pitchFamily="18" charset="0"/>
+                <a:cs typeface="Times New Roman" panose="02020603050405020304" pitchFamily="18" charset="0"/>
+              </a:rPr>
+              <a:t>Null Hypothesis (H₀): </a:t>
+            </a:r>
+            <a:r>
               <a:rPr dirty="0">
                 <a:latin typeface="Times New Roman" panose="02020603050405020304" pitchFamily="18" charset="0"/>
                 <a:cs typeface="Times New Roman" panose="02020603050405020304" pitchFamily="18" charset="0"/>
               </a:rPr>
-              <a:t>Null Hypothesis (H₀): There is no statistically significant difference in average sales.</a:t>
+              <a:t>There is no statistically significant difference in average sales.</a:t>
             </a:r>
           </a:p>
           <a:p>
@@ -5495,11 +5921,18 @@
               <a:defRPr sz="1900"/>
             </a:pPr>
             <a:r>
+              <a:rPr b="1" dirty="0">
+                <a:latin typeface="Times New Roman" panose="02020603050405020304" pitchFamily="18" charset="0"/>
+                <a:cs typeface="Times New Roman" panose="02020603050405020304" pitchFamily="18" charset="0"/>
+              </a:rPr>
+              <a:t>Alternative Hypothesis (H₁): </a:t>
+            </a:r>
+            <a:r>
               <a:rPr dirty="0">
                 <a:latin typeface="Times New Roman" panose="02020603050405020304" pitchFamily="18" charset="0"/>
                 <a:cs typeface="Times New Roman" panose="02020603050405020304" pitchFamily="18" charset="0"/>
               </a:rPr>
-              <a:t>Alternative Hypothesis (H₁): There is a statistically significant difference in average sales.</a:t>
+              <a:t>There is a statistically significant difference in average sales.</a:t>
             </a:r>
           </a:p>
           <a:p>
@@ -5512,11 +5945,18 @@
               <a:defRPr sz="1900"/>
             </a:pPr>
             <a:r>
+              <a:rPr b="1" dirty="0">
+                <a:latin typeface="Times New Roman" panose="02020603050405020304" pitchFamily="18" charset="0"/>
+                <a:cs typeface="Times New Roman" panose="02020603050405020304" pitchFamily="18" charset="0"/>
+              </a:rPr>
+              <a:t>Significance level: </a:t>
+            </a:r>
+            <a:r>
               <a:rPr dirty="0">
                 <a:latin typeface="Times New Roman" panose="02020603050405020304" pitchFamily="18" charset="0"/>
                 <a:cs typeface="Times New Roman" panose="02020603050405020304" pitchFamily="18" charset="0"/>
               </a:rPr>
-              <a:t>Significance level: α = 0.05.</a:t>
+              <a:t>α = 0.05.</a:t>
             </a:r>
           </a:p>
         </p:txBody>
@@ -5621,7 +6061,7 @@
         <p:spPr>
           <a:xfrm>
             <a:off x="731520" y="1234440"/>
-            <a:ext cx="10789920" cy="2908489"/>
+            <a:ext cx="10789920" cy="3354765"/>
           </a:xfrm>
           <a:prstGeom prst="rect">
             <a:avLst/>
@@ -5643,11 +6083,18 @@
               <a:defRPr sz="1900"/>
             </a:pPr>
             <a:r>
+              <a:rPr b="1" dirty="0">
+                <a:latin typeface="Times New Roman" panose="02020603050405020304" pitchFamily="18" charset="0"/>
+                <a:cs typeface="Times New Roman" panose="02020603050405020304" pitchFamily="18" charset="0"/>
+              </a:rPr>
+              <a:t>Statistical test: </a:t>
+            </a:r>
+            <a:r>
               <a:rPr dirty="0">
                 <a:latin typeface="Times New Roman" panose="02020603050405020304" pitchFamily="18" charset="0"/>
                 <a:cs typeface="Times New Roman" panose="02020603050405020304" pitchFamily="18" charset="0"/>
               </a:rPr>
-              <a:t>Statistical test: Independent two-sample t-test.</a:t>
+              <a:t>Independent two-sample t-test.</a:t>
             </a:r>
           </a:p>
           <a:p>
@@ -5660,7 +6107,7 @@
               <a:defRPr sz="1900"/>
             </a:pPr>
             <a:r>
-              <a:rPr dirty="0">
+              <a:rPr b="1" dirty="0">
                 <a:latin typeface="Times New Roman" panose="02020603050405020304" pitchFamily="18" charset="0"/>
                 <a:cs typeface="Times New Roman" panose="02020603050405020304" pitchFamily="18" charset="0"/>
               </a:rPr>
@@ -5684,7 +6131,7 @@
               <a:defRPr sz="1900"/>
             </a:pPr>
             <a:r>
-              <a:rPr dirty="0">
+              <a:rPr b="1" dirty="0">
                 <a:latin typeface="Times New Roman" panose="02020603050405020304" pitchFamily="18" charset="0"/>
                 <a:cs typeface="Times New Roman" panose="02020603050405020304" pitchFamily="18" charset="0"/>
               </a:rPr>
@@ -5697,10 +6144,6 @@
               </a:rPr>
               <a:t>136883.20862985688</a:t>
             </a:r>
-            <a:endParaRPr lang="en-US" dirty="0">
-              <a:latin typeface="Times New Roman" panose="02020603050405020304" pitchFamily="18" charset="0"/>
-              <a:cs typeface="Times New Roman" panose="02020603050405020304" pitchFamily="18" charset="0"/>
-            </a:endParaRPr>
           </a:p>
           <a:p>
             <a:pPr marL="342900" indent="-342900">
@@ -5712,11 +6155,18 @@
               <a:defRPr sz="1900"/>
             </a:pPr>
             <a:r>
-              <a:rPr dirty="0">
-                <a:latin typeface="Times New Roman" panose="02020603050405020304" pitchFamily="18" charset="0"/>
-                <a:cs typeface="Times New Roman" panose="02020603050405020304" pitchFamily="18" charset="0"/>
-              </a:rPr>
-              <a:t>T-Statistic: </a:t>
+              <a:rPr b="1" dirty="0">
+                <a:latin typeface="Times New Roman" panose="02020603050405020304" pitchFamily="18" charset="0"/>
+                <a:cs typeface="Times New Roman" panose="02020603050405020304" pitchFamily="18" charset="0"/>
+              </a:rPr>
+              <a:t>T-Statistic</a:t>
+            </a:r>
+            <a:r>
+              <a:rPr lang="en-IN" b="1" dirty="0">
+                <a:latin typeface="Times New Roman" panose="02020603050405020304" pitchFamily="18" charset="0"/>
+                <a:cs typeface="Times New Roman" panose="02020603050405020304" pitchFamily="18" charset="0"/>
+              </a:rPr>
+              <a:t>: </a:t>
             </a:r>
             <a:r>
               <a:rPr lang="en-IN" dirty="0">
@@ -5725,7 +6175,7 @@
               </a:rPr>
               <a:t>0.6826103913380815</a:t>
             </a:r>
-            <a:endParaRPr lang="en-US" dirty="0">
+            <a:endParaRPr dirty="0">
               <a:latin typeface="Times New Roman" panose="02020603050405020304" pitchFamily="18" charset="0"/>
               <a:cs typeface="Times New Roman" panose="02020603050405020304" pitchFamily="18" charset="0"/>
             </a:endParaRPr>
@@ -5740,11 +6190,18 @@
               <a:defRPr sz="1900"/>
             </a:pPr>
             <a:r>
+              <a:rPr b="1" dirty="0">
+                <a:latin typeface="Times New Roman" panose="02020603050405020304" pitchFamily="18" charset="0"/>
+                <a:cs typeface="Times New Roman" panose="02020603050405020304" pitchFamily="18" charset="0"/>
+              </a:rPr>
+              <a:t>P-Value:</a:t>
+            </a:r>
+            <a:r>
               <a:rPr dirty="0">
                 <a:latin typeface="Times New Roman" panose="02020603050405020304" pitchFamily="18" charset="0"/>
                 <a:cs typeface="Times New Roman" panose="02020603050405020304" pitchFamily="18" charset="0"/>
               </a:rPr>
-              <a:t>P-Value: </a:t>
+              <a:t> </a:t>
             </a:r>
             <a:r>
               <a:rPr lang="en-IN" dirty="0">
@@ -5753,10 +6210,6 @@
               </a:rPr>
               <a:t>0.49501147851458344</a:t>
             </a:r>
-            <a:endParaRPr lang="en-US" dirty="0">
-              <a:latin typeface="Times New Roman" panose="02020603050405020304" pitchFamily="18" charset="0"/>
-              <a:cs typeface="Times New Roman" panose="02020603050405020304" pitchFamily="18" charset="0"/>
-            </a:endParaRPr>
           </a:p>
           <a:p>
             <a:pPr marL="342900" indent="-342900">
@@ -5768,19 +6221,36 @@
               <a:defRPr sz="1900"/>
             </a:pPr>
             <a:r>
-              <a:rPr dirty="0">
+              <a:rPr b="1" dirty="0">
                 <a:latin typeface="Times New Roman" panose="02020603050405020304" pitchFamily="18" charset="0"/>
                 <a:cs typeface="Times New Roman" panose="02020603050405020304" pitchFamily="18" charset="0"/>
               </a:rPr>
               <a:t>Decision:</a:t>
             </a:r>
             <a:r>
+              <a:rPr lang="en-IN" b="1" dirty="0">
+                <a:latin typeface="Times New Roman" panose="02020603050405020304" pitchFamily="18" charset="0"/>
+                <a:cs typeface="Times New Roman" panose="02020603050405020304" pitchFamily="18" charset="0"/>
+              </a:rPr>
+              <a:t> </a:t>
+            </a:r>
+            <a:r>
               <a:rPr lang="en-US" dirty="0">
                 <a:latin typeface="Times New Roman" panose="02020603050405020304" pitchFamily="18" charset="0"/>
                 <a:cs typeface="Times New Roman" panose="02020603050405020304" pitchFamily="18" charset="0"/>
               </a:rPr>
-              <a:t> Fail to reject the null hypothesis. There is not enough statistical evidence to conclude that average sales differ between male and female groups.</a:t>
-            </a:r>
+              <a:t>Fail to reject the null hypothesis. There is not enough statistical evidence to conclude that average sales differ between male and female groups.</a:t>
+            </a:r>
+          </a:p>
+          <a:p>
+            <a:pPr marL="342900" indent="-342900">
+              <a:spcAft>
+                <a:spcPts val="1200"/>
+              </a:spcAft>
+              <a:buFont typeface="Arial" panose="020B0604020202020204" pitchFamily="34" charset="0"/>
+              <a:buChar char="•"/>
+              <a:defRPr sz="1900"/>
+            </a:pPr>
             <a:endParaRPr dirty="0">
               <a:latin typeface="Times New Roman" panose="02020603050405020304" pitchFamily="18" charset="0"/>
               <a:cs typeface="Times New Roman" panose="02020603050405020304" pitchFamily="18" charset="0"/>
@@ -5901,40 +6371,60 @@
           </a:bodyPr>
           <a:lstStyle/>
           <a:p>
-            <a:pPr>
+            <a:pPr marL="342900" indent="-342900">
               <a:spcAft>
                 <a:spcPts val="1200"/>
               </a:spcAft>
+              <a:buFont typeface="Arial" panose="020B0604020202020204" pitchFamily="34" charset="0"/>
+              <a:buChar char="•"/>
               <a:defRPr sz="1900"/>
             </a:pPr>
             <a:r>
+              <a:rPr b="1" dirty="0">
+                <a:latin typeface="Times New Roman" panose="02020603050405020304" pitchFamily="18" charset="0"/>
+                <a:cs typeface="Times New Roman" panose="02020603050405020304" pitchFamily="18" charset="0"/>
+              </a:rPr>
+              <a:t>If p-value &lt; 0.05: </a:t>
+            </a:r>
+            <a:r>
               <a:rPr dirty="0">
                 <a:latin typeface="Times New Roman" panose="02020603050405020304" pitchFamily="18" charset="0"/>
                 <a:cs typeface="Times New Roman" panose="02020603050405020304" pitchFamily="18" charset="0"/>
               </a:rPr>
-              <a:t>If p-value &lt; 0.05: reject H₀; there is statistically significant evidence of a difference.</a:t>
-            </a:r>
-          </a:p>
-          <a:p>
-            <a:pPr>
+              <a:t>reject H₀; there is statistically significant evidence of a difference.</a:t>
+            </a:r>
+          </a:p>
+          <a:p>
+            <a:pPr marL="342900" indent="-342900">
               <a:spcAft>
                 <a:spcPts val="1200"/>
               </a:spcAft>
+              <a:buFont typeface="Arial" panose="020B0604020202020204" pitchFamily="34" charset="0"/>
+              <a:buChar char="•"/>
               <a:defRPr sz="1900"/>
             </a:pPr>
             <a:r>
+              <a:rPr b="1" dirty="0">
+                <a:latin typeface="Times New Roman" panose="02020603050405020304" pitchFamily="18" charset="0"/>
+                <a:cs typeface="Times New Roman" panose="02020603050405020304" pitchFamily="18" charset="0"/>
+              </a:rPr>
+              <a:t>If p-value ≥ 0.05: </a:t>
+            </a:r>
+            <a:r>
               <a:rPr dirty="0">
                 <a:latin typeface="Times New Roman" panose="02020603050405020304" pitchFamily="18" charset="0"/>
                 <a:cs typeface="Times New Roman" panose="02020603050405020304" pitchFamily="18" charset="0"/>
               </a:rPr>
-              <a:t>If p-value ≥ 0.05: fail to reject H₀; there is not enough statistical evidence to conclude a difference.</a:t>
-            </a:r>
-          </a:p>
-          <a:p>
-            <a:pPr>
+              <a:t>fail to reject H₀; there is not enough statistical evidence to conclude a difference.</a:t>
+            </a:r>
+          </a:p>
+          <a:p>
+            <a:pPr marL="342900" indent="-342900">
               <a:spcAft>
                 <a:spcPts val="1200"/>
               </a:spcAft>
+              <a:buFont typeface="Arial" panose="020B0604020202020204" pitchFamily="34" charset="0"/>
+              <a:buChar char="•"/>
               <a:defRPr sz="1900"/>
             </a:pPr>
             <a:r>
@@ -5946,10 +6436,12 @@
             </a:r>
           </a:p>
           <a:p>
-            <a:pPr>
+            <a:pPr marL="342900" indent="-342900">
               <a:spcAft>
                 <a:spcPts val="1200"/>
               </a:spcAft>
+              <a:buFont typeface="Arial" panose="020B0604020202020204" pitchFamily="34" charset="0"/>
+              <a:buChar char="•"/>
               <a:defRPr sz="1900"/>
             </a:pPr>
             <a:r>
@@ -6319,4 +6811,319 @@
   </a:objectDefaults>
   <a:extraClrSchemeLst/>
 </a:theme>
+</file>
+
+<file path=ppt/theme/theme2.xml><?xml version="1.0" encoding="utf-8"?>
+<a:theme xmlns:a="http://schemas.openxmlformats.org/drawingml/2006/main" name="Office Theme">
+  <a:themeElements>
+    <a:clrScheme name="Office">
+      <a:dk1>
+        <a:sysClr val="windowText" lastClr="000000"/>
+      </a:dk1>
+      <a:lt1>
+        <a:sysClr val="window" lastClr="FFFFFF"/>
+      </a:lt1>
+      <a:dk2>
+        <a:srgbClr val="0E2841"/>
+      </a:dk2>
+      <a:lt2>
+        <a:srgbClr val="E8E8E8"/>
+      </a:lt2>
+      <a:accent1>
+        <a:srgbClr val="156082"/>
+      </a:accent1>
+      <a:accent2>
+        <a:srgbClr val="E97132"/>
+      </a:accent2>
+      <a:accent3>
+        <a:srgbClr val="196B24"/>
+      </a:accent3>
+      <a:accent4>
+        <a:srgbClr val="0F9ED5"/>
+      </a:accent4>
+      <a:accent5>
+        <a:srgbClr val="A02B93"/>
+      </a:accent5>
+      <a:accent6>
+        <a:srgbClr val="4EA72E"/>
+      </a:accent6>
+      <a:hlink>
+        <a:srgbClr val="467886"/>
+      </a:hlink>
+      <a:folHlink>
+        <a:srgbClr val="96607D"/>
+      </a:folHlink>
+    </a:clrScheme>
+    <a:fontScheme name="Office">
+      <a:majorFont>
+        <a:latin typeface="Aptos Display" panose="02110004020202020204"/>
+        <a:ea typeface=""/>
+        <a:cs typeface=""/>
+        <a:font script="Jpan" typeface="游ゴシック Light"/>
+        <a:font script="Hang" typeface="맑은 고딕"/>
+        <a:font script="Hans" typeface="等线 Light"/>
+        <a:font script="Hant" typeface="新細明體"/>
+        <a:font script="Arab" typeface="Times New Roman"/>
+        <a:font script="Hebr" typeface="Times New Roman"/>
+        <a:font script="Thai" typeface="Angsana New"/>
+        <a:font script="Ethi" typeface="Nyala"/>
+        <a:font script="Beng" typeface="Vrinda"/>
+        <a:font script="Gujr" typeface="Shruti"/>
+        <a:font script="Khmr" typeface="MoolBoran"/>
+        <a:font script="Knda" typeface="Tunga"/>
+        <a:font script="Guru" typeface="Raavi"/>
+        <a:font script="Cans" typeface="Euphemia"/>
+        <a:font script="Cher" typeface="Plantagenet Cherokee"/>
+        <a:font script="Yiii" typeface="Microsoft Yi Baiti"/>
+        <a:font script="Tibt" typeface="Microsoft Himalaya"/>
+        <a:font script="Thaa" typeface="MV Boli"/>
+        <a:font script="Deva" typeface="Mangal"/>
+        <a:font script="Telu" typeface="Gautami"/>
+        <a:font script="Taml" typeface="Latha"/>
+        <a:font script="Syrc" typeface="Estrangelo Edessa"/>
+        <a:font script="Orya" typeface="Kalinga"/>
+        <a:font script="Mlym" typeface="Kartika"/>
+        <a:font script="Laoo" typeface="DokChampa"/>
+        <a:font script="Sinh" typeface="Iskoola Pota"/>
+        <a:font script="Mong" typeface="Mongolian Baiti"/>
+        <a:font script="Viet" typeface="Times New Roman"/>
+        <a:font script="Uigh" typeface="Microsoft Uighur"/>
+        <a:font script="Geor" typeface="Sylfaen"/>
+        <a:font script="Armn" typeface="Arial"/>
+        <a:font script="Bugi" typeface="Leelawadee UI"/>
+        <a:font script="Bopo" typeface="Microsoft JhengHei"/>
+        <a:font script="Java" typeface="Javanese Text"/>
+        <a:font script="Lisu" typeface="Segoe UI"/>
+        <a:font script="Mymr" typeface="Myanmar Text"/>
+        <a:font script="Nkoo" typeface="Ebrima"/>
+        <a:font script="Olck" typeface="Nirmala UI"/>
+        <a:font script="Osma" typeface="Ebrima"/>
+        <a:font script="Phag" typeface="Phagspa"/>
+        <a:font script="Syrn" typeface="Estrangelo Edessa"/>
+        <a:font script="Syrj" typeface="Estrangelo Edessa"/>
+        <a:font script="Syre" typeface="Estrangelo Edessa"/>
+        <a:font script="Sora" typeface="Nirmala UI"/>
+        <a:font script="Tale" typeface="Microsoft Tai Le"/>
+        <a:font script="Talu" typeface="Microsoft New Tai Lue"/>
+        <a:font script="Tfng" typeface="Ebrima"/>
+      </a:majorFont>
+      <a:minorFont>
+        <a:latin typeface="Aptos" panose="02110004020202020204"/>
+        <a:ea typeface=""/>
+        <a:cs typeface=""/>
+        <a:font script="Jpan" typeface="游ゴシック"/>
+        <a:font script="Hang" typeface="맑은 고딕"/>
+        <a:font script="Hans" typeface="等线"/>
+        <a:font script="Hant" typeface="新細明體"/>
+        <a:font script="Arab" typeface="Arial"/>
+        <a:font script="Hebr" typeface="Arial"/>
+        <a:font script="Thai" typeface="Cordia New"/>
+        <a:font script="Ethi" typeface="Nyala"/>
+        <a:font script="Beng" typeface="Vrinda"/>
+        <a:font script="Gujr" typeface="Shruti"/>
+        <a:font script="Khmr" typeface="DaunPenh"/>
+        <a:font script="Knda" typeface="Tunga"/>
+        <a:font script="Guru" typeface="Raavi"/>
+        <a:font script="Cans" typeface="Euphemia"/>
+        <a:font script="Cher" typeface="Plantagenet Cherokee"/>
+        <a:font script="Yiii" typeface="Microsoft Yi Baiti"/>
+        <a:font script="Tibt" typeface="Microsoft Himalaya"/>
+        <a:font script="Thaa" typeface="MV Boli"/>
+        <a:font script="Deva" typeface="Mangal"/>
+        <a:font script="Telu" typeface="Gautami"/>
+        <a:font script="Taml" typeface="Latha"/>
+        <a:font script="Syrc" typeface="Estrangelo Edessa"/>
+        <a:font script="Orya" typeface="Kalinga"/>
+        <a:font script="Mlym" typeface="Kartika"/>
+        <a:font script="Laoo" typeface="DokChampa"/>
+        <a:font script="Sinh" typeface="Iskoola Pota"/>
+        <a:font script="Mong" typeface="Mongolian Baiti"/>
+        <a:font script="Viet" typeface="Arial"/>
+        <a:font script="Uigh" typeface="Microsoft Uighur"/>
+        <a:font script="Geor" typeface="Sylfaen"/>
+        <a:font script="Armn" typeface="Arial"/>
+        <a:font script="Bugi" typeface="Leelawadee UI"/>
+        <a:font script="Bopo" typeface="Microsoft JhengHei"/>
+        <a:font script="Java" typeface="Javanese Text"/>
+        <a:font script="Lisu" typeface="Segoe UI"/>
+        <a:font script="Mymr" typeface="Myanmar Text"/>
+        <a:font script="Nkoo" typeface="Ebrima"/>
+        <a:font script="Olck" typeface="Nirmala UI"/>
+        <a:font script="Osma" typeface="Ebrima"/>
+        <a:font script="Phag" typeface="Phagspa"/>
+        <a:font script="Syrn" typeface="Estrangelo Edessa"/>
+        <a:font script="Syrj" typeface="Estrangelo Edessa"/>
+        <a:font script="Syre" typeface="Estrangelo Edessa"/>
+        <a:font script="Sora" typeface="Nirmala UI"/>
+        <a:font script="Tale" typeface="Microsoft Tai Le"/>
+        <a:font script="Talu" typeface="Microsoft New Tai Lue"/>
+        <a:font script="Tfng" typeface="Ebrima"/>
+      </a:minorFont>
+    </a:fontScheme>
+    <a:fmtScheme name="Office">
+      <a:fillStyleLst>
+        <a:solidFill>
+          <a:schemeClr val="phClr"/>
+        </a:solidFill>
+        <a:gradFill rotWithShape="1">
+          <a:gsLst>
+            <a:gs pos="0">
+              <a:schemeClr val="phClr">
+                <a:lumMod val="110000"/>
+                <a:satMod val="105000"/>
+                <a:tint val="67000"/>
+              </a:schemeClr>
+            </a:gs>
+            <a:gs pos="50000">
+              <a:schemeClr val="phClr">
+                <a:lumMod val="105000"/>
+                <a:satMod val="103000"/>
+                <a:tint val="73000"/>
+              </a:schemeClr>
+            </a:gs>
+            <a:gs pos="100000">
+              <a:schemeClr val="phClr">
+                <a:lumMod val="105000"/>
+                <a:satMod val="109000"/>
+                <a:tint val="81000"/>
+              </a:schemeClr>
+            </a:gs>
+          </a:gsLst>
+          <a:lin ang="5400000" scaled="0"/>
+        </a:gradFill>
+        <a:gradFill rotWithShape="1">
+          <a:gsLst>
+            <a:gs pos="0">
+              <a:schemeClr val="phClr">
+                <a:satMod val="103000"/>
+                <a:lumMod val="102000"/>
+                <a:tint val="94000"/>
+              </a:schemeClr>
+            </a:gs>
+            <a:gs pos="50000">
+              <a:schemeClr val="phClr">
+                <a:satMod val="110000"/>
+                <a:lumMod val="100000"/>
+                <a:shade val="100000"/>
+              </a:schemeClr>
+            </a:gs>
+            <a:gs pos="100000">
+              <a:schemeClr val="phClr">
+                <a:lumMod val="99000"/>
+                <a:satMod val="120000"/>
+                <a:shade val="78000"/>
+              </a:schemeClr>
+            </a:gs>
+          </a:gsLst>
+          <a:lin ang="5400000" scaled="0"/>
+        </a:gradFill>
+      </a:fillStyleLst>
+      <a:lnStyleLst>
+        <a:ln w="12700" cap="flat" cmpd="sng" algn="ctr">
+          <a:solidFill>
+            <a:schemeClr val="phClr"/>
+          </a:solidFill>
+          <a:prstDash val="solid"/>
+          <a:miter lim="800000"/>
+        </a:ln>
+        <a:ln w="19050" cap="flat" cmpd="sng" algn="ctr">
+          <a:solidFill>
+            <a:schemeClr val="phClr"/>
+          </a:solidFill>
+          <a:prstDash val="solid"/>
+          <a:miter lim="800000"/>
+        </a:ln>
+        <a:ln w="25400" cap="flat" cmpd="sng" algn="ctr">
+          <a:solidFill>
+            <a:schemeClr val="phClr"/>
+          </a:solidFill>
+          <a:prstDash val="solid"/>
+          <a:miter lim="800000"/>
+        </a:ln>
+      </a:lnStyleLst>
+      <a:effectStyleLst>
+        <a:effectStyle>
+          <a:effectLst/>
+        </a:effectStyle>
+        <a:effectStyle>
+          <a:effectLst/>
+        </a:effectStyle>
+        <a:effectStyle>
+          <a:effectLst>
+            <a:outerShdw blurRad="57150" dist="19050" dir="5400000" algn="ctr" rotWithShape="0">
+              <a:srgbClr val="000000">
+                <a:alpha val="63000"/>
+              </a:srgbClr>
+            </a:outerShdw>
+          </a:effectLst>
+        </a:effectStyle>
+      </a:effectStyleLst>
+      <a:bgFillStyleLst>
+        <a:solidFill>
+          <a:schemeClr val="phClr"/>
+        </a:solidFill>
+        <a:solidFill>
+          <a:schemeClr val="phClr">
+            <a:tint val="95000"/>
+            <a:satMod val="170000"/>
+          </a:schemeClr>
+        </a:solidFill>
+        <a:gradFill rotWithShape="1">
+          <a:gsLst>
+            <a:gs pos="0">
+              <a:schemeClr val="phClr">
+                <a:tint val="93000"/>
+                <a:satMod val="150000"/>
+                <a:shade val="98000"/>
+                <a:lumMod val="102000"/>
+              </a:schemeClr>
+            </a:gs>
+            <a:gs pos="50000">
+              <a:schemeClr val="phClr">
+                <a:tint val="98000"/>
+                <a:satMod val="130000"/>
+                <a:shade val="90000"/>
+                <a:lumMod val="103000"/>
+              </a:schemeClr>
+            </a:gs>
+            <a:gs pos="100000">
+              <a:schemeClr val="phClr">
+                <a:shade val="63000"/>
+                <a:satMod val="120000"/>
+              </a:schemeClr>
+            </a:gs>
+          </a:gsLst>
+          <a:lin ang="5400000" scaled="0"/>
+        </a:gradFill>
+      </a:bgFillStyleLst>
+    </a:fmtScheme>
+  </a:themeElements>
+  <a:objectDefaults>
+    <a:lnDef>
+      <a:spPr/>
+      <a:bodyPr/>
+      <a:lstStyle/>
+      <a:style>
+        <a:lnRef idx="2">
+          <a:schemeClr val="accent1"/>
+        </a:lnRef>
+        <a:fillRef idx="0">
+          <a:schemeClr val="accent1"/>
+        </a:fillRef>
+        <a:effectRef idx="1">
+          <a:schemeClr val="accent1"/>
+        </a:effectRef>
+        <a:fontRef idx="minor">
+          <a:schemeClr val="tx1"/>
+        </a:fontRef>
+      </a:style>
+    </a:lnDef>
+  </a:objectDefaults>
+  <a:extraClrSchemeLst/>
+  <a:extLst>
+    <a:ext uri="{05A4C25C-085E-4340-85A3-A5531E510DB2}">
+      <thm15:themeFamily xmlns:thm15="http://schemas.microsoft.com/office/thememl/2012/main" name="Office Theme" id="{2E142A2C-CD16-42D6-873A-C26D2A0506FA}" vid="{1BDDFF52-6CD6-40A5-AB3C-68EB2F1E4D0A}"/>
+    </a:ext>
+  </a:extLst>
+</a:theme>
 </file>